--- a/reports/slide_DDS_Edge_DL_v4.pptx
+++ b/reports/slide_DDS_Edge_DL_v4.pptx
@@ -22610,16 +22610,7 @@
                 </a:solidFill>
                 <a:latin typeface="Arial"/>
               </a:rPr>
-              <a:t>Val </a:t>
-            </a:r>
-            <a:r>
-              <a:rPr lang="en-US" sz="2400" b="1">
-                <a:solidFill>
-                  <a:srgbClr val="FFFFFF"/>
-                </a:solidFill>
-                <a:latin typeface="Arial"/>
-              </a:rPr>
-              <a:t>vs test</a:t>
+              <a:t>Val vs test</a:t>
             </a:r>
             <a:endParaRPr sz="2400" b="1" dirty="0">
               <a:solidFill>
